--- a/course/slides/AF-TRACKF-M02/AF-TRACKF-M02-v1.pptx
+++ b/course/slides/AF-TRACKF-M02/AF-TRACKF-M02-v1.pptx
@@ -9374,7 +9374,7 @@
                 </a:solidFill>
                 <a:latin typeface="Lexend"/>
               </a:rPr>
-              <a:t>Why does a person decide here, and not a tool?</a:t>
+              <a:t>Because Merit is the regulatory and data protection kill.</a:t>
             </a:r>
           </a:p>
         </p:txBody>
@@ -10728,7 +10728,7 @@
                 </a:solidFill>
                 <a:latin typeface="Lexend"/>
               </a:rPr>
-              <a:t>KILL means the idea stops.</a:t>
+              <a:t>It burns the id, which means that number is never handed to another idea.</a:t>
             </a:r>
           </a:p>
         </p:txBody>
@@ -14926,7 +14926,7 @@
         </p:blipFill>
         <p:spPr>
           <a:xfrm>
-            <a:off x="609600" y="3185160"/>
+            <a:off x="609600" y="3020060"/>
             <a:ext cx="1016000" cy="1016000"/>
           </a:xfrm>
           <a:prstGeom prst="rect">
@@ -14942,7 +14942,7 @@
         </p:nvSpPr>
         <p:spPr>
           <a:xfrm>
-            <a:off x="2070100" y="3147060"/>
+            <a:off x="2070100" y="2981960"/>
             <a:ext cx="9563100" cy="619760"/>
           </a:xfrm>
           <a:prstGeom prst="rect">
@@ -14981,8 +14981,8 @@
         </p:nvSpPr>
         <p:spPr>
           <a:xfrm>
-            <a:off x="2070100" y="3931920"/>
-            <a:ext cx="9563100" cy="355600"/>
+            <a:off x="2070100" y="3766820"/>
+            <a:ext cx="9563100" cy="685800"/>
           </a:xfrm>
           <a:prstGeom prst="rect">
             <a:avLst/>
@@ -15007,7 +15007,23 @@
                 </a:solidFill>
                 <a:latin typeface="Lexend"/>
               </a:rPr>
-              <a:t>Next comes the competitor sweep.</a:t>
+              <a:t>A competitor, or rival, is any product people already use to solve the same</a:t>
+            </a:r>
+          </a:p>
+          <a:p>
+            <a:pPr algn="l">
+              <a:lnSpc>
+                <a:spcPts val="2600"/>
+              </a:lnSpc>
+            </a:pPr>
+            <a:r>
+              <a:rPr sz="2000" b="0">
+                <a:solidFill>
+                  <a:srgbClr val="756E65"/>
+                </a:solidFill>
+                <a:latin typeface="Lexend"/>
+              </a:rPr>
+              <a:t>problem.</a:t>
             </a:r>
           </a:p>
         </p:txBody>
@@ -15372,7 +15388,7 @@
         </p:blipFill>
         <p:spPr>
           <a:xfrm>
-            <a:off x="609600" y="3185160"/>
+            <a:off x="609600" y="3020060"/>
             <a:ext cx="1016000" cy="1016000"/>
           </a:xfrm>
           <a:prstGeom prst="rect">
@@ -15388,7 +15404,7 @@
         </p:nvSpPr>
         <p:spPr>
           <a:xfrm>
-            <a:off x="2070100" y="3147060"/>
+            <a:off x="2070100" y="2981960"/>
             <a:ext cx="9563100" cy="619760"/>
           </a:xfrm>
           <a:prstGeom prst="rect">
@@ -15427,8 +15443,8 @@
         </p:nvSpPr>
         <p:spPr>
           <a:xfrm>
-            <a:off x="2070100" y="3931920"/>
-            <a:ext cx="9563100" cy="355600"/>
+            <a:off x="2070100" y="3766820"/>
+            <a:ext cx="9563100" cy="685800"/>
           </a:xfrm>
           <a:prstGeom prst="rect">
             <a:avLst/>
@@ -15453,7 +15469,23 @@
                 </a:solidFill>
                 <a:latin typeface="Lexend"/>
               </a:rPr>
-              <a:t>The sweep then collects customer words.</a:t>
+              <a:t>This means 10 exact phrases people use for the pain, and 10 for the result</a:t>
+            </a:r>
+          </a:p>
+          <a:p>
+            <a:pPr algn="l">
+              <a:lnSpc>
+                <a:spcPts val="2600"/>
+              </a:lnSpc>
+            </a:pPr>
+            <a:r>
+              <a:rPr sz="2000" b="0">
+                <a:solidFill>
+                  <a:srgbClr val="756E65"/>
+                </a:solidFill>
+                <a:latin typeface="Lexend"/>
+              </a:rPr>
+              <a:t>they want, copied from reviews and groups word for word.</a:t>
             </a:r>
           </a:p>
         </p:txBody>
@@ -16264,7 +16296,7 @@
         </p:blipFill>
         <p:spPr>
           <a:xfrm>
-            <a:off x="609600" y="3185160"/>
+            <a:off x="609600" y="3020060"/>
             <a:ext cx="1016000" cy="1016000"/>
           </a:xfrm>
           <a:prstGeom prst="rect">
@@ -16280,7 +16312,7 @@
         </p:nvSpPr>
         <p:spPr>
           <a:xfrm>
-            <a:off x="2070100" y="3147060"/>
+            <a:off x="2070100" y="2981960"/>
             <a:ext cx="9563100" cy="619760"/>
           </a:xfrm>
           <a:prstGeom prst="rect">
@@ -16319,8 +16351,8 @@
         </p:nvSpPr>
         <p:spPr>
           <a:xfrm>
-            <a:off x="2070100" y="3931920"/>
-            <a:ext cx="9563100" cy="355600"/>
+            <a:off x="2070100" y="3766820"/>
+            <a:ext cx="9563100" cy="685800"/>
           </a:xfrm>
           <a:prstGeom prst="rect">
             <a:avLst/>
@@ -16345,7 +16377,23 @@
                 </a:solidFill>
                 <a:latin typeface="Lexend"/>
               </a:rPr>
-              <a:t>Next, the market.</a:t>
+              <a:t>Market size means roughly how many possible customers there are, and the</a:t>
+            </a:r>
+          </a:p>
+          <a:p>
+            <a:pPr algn="l">
+              <a:lnSpc>
+                <a:spcPts val="2600"/>
+              </a:lnSpc>
+            </a:pPr>
+            <a:r>
+              <a:rPr sz="2000" b="0">
+                <a:solidFill>
+                  <a:srgbClr val="756E65"/>
+                </a:solidFill>
+                <a:latin typeface="Lexend"/>
+              </a:rPr>
+              <a:t>trend means whether that number is growing or shrinking.</a:t>
             </a:r>
           </a:p>
         </p:txBody>
